--- a/events/eswc2026/sulo-tutorial-intro.pptx
+++ b/events/eswc2026/sulo-tutorial-intro.pptx
@@ -8818,7 +8818,7 @@
                   <a:srgbClr val="2C2C2C"/>
                 </a:solidFill>
               </a:rPr>
-              <a:t>40</a:t>
+              <a:t>30</a:t>
             </a:r>
             <a:r>
               <a:rPr sz="1100" b="0" i="0" dirty="0">
@@ -9478,20 +9478,12 @@
           <a:p>
             <a:pPr algn="l"/>
             <a:r>
-              <a:rPr sz="1100" b="0" i="0" dirty="0">
-                <a:solidFill>
-                  <a:srgbClr val="2C2C2C"/>
-                </a:solidFill>
-              </a:rPr>
-              <a:t>1</a:t>
-            </a:r>
-            <a:r>
               <a:rPr lang="en-US" sz="1100" dirty="0">
                 <a:solidFill>
                   <a:srgbClr val="2C2C2C"/>
                 </a:solidFill>
               </a:rPr>
-              <a:t>5</a:t>
+              <a:t>25</a:t>
             </a:r>
             <a:r>
               <a:rPr sz="1100" b="0" i="0" dirty="0">
@@ -9834,7 +9826,7 @@
                   <a:srgbClr val="2C2C2C"/>
                 </a:solidFill>
               </a:rPr>
-              <a:t>30</a:t>
+              <a:t>15</a:t>
             </a:r>
             <a:r>
               <a:rPr sz="1100" b="0" i="0" dirty="0">
@@ -10167,12 +10159,12 @@
               <a:t>1</a:t>
             </a:r>
             <a:r>
-              <a:rPr lang="en-US" sz="1100" b="0" i="0" dirty="0">
-                <a:solidFill>
-                  <a:srgbClr val="2C2C2C"/>
-                </a:solidFill>
-              </a:rPr>
-              <a:t>0</a:t>
+              <a:rPr lang="en-US" sz="1100" dirty="0">
+                <a:solidFill>
+                  <a:srgbClr val="2C2C2C"/>
+                </a:solidFill>
+              </a:rPr>
+              <a:t>5 </a:t>
             </a:r>
             <a:r>
               <a:rPr sz="1100" b="0" i="0" dirty="0">
@@ -10180,7 +10172,7 @@
                   <a:srgbClr val="2C2C2C"/>
                 </a:solidFill>
               </a:rPr>
-              <a:t> min</a:t>
+              <a:t>min</a:t>
             </a:r>
           </a:p>
         </p:txBody>
@@ -10801,12 +10793,12 @@
               <a:t>1</a:t>
             </a:r>
             <a:r>
-              <a:rPr lang="en-US" sz="1100" b="0" i="0" dirty="0">
-                <a:solidFill>
-                  <a:srgbClr val="2C2C2C"/>
-                </a:solidFill>
-              </a:rPr>
-              <a:t>0</a:t>
+              <a:rPr lang="en-US" sz="1100" dirty="0">
+                <a:solidFill>
+                  <a:srgbClr val="2C2C2C"/>
+                </a:solidFill>
+              </a:rPr>
+              <a:t>5</a:t>
             </a:r>
             <a:r>
               <a:rPr sz="1100" b="0" i="0" dirty="0">
@@ -11134,7 +11126,7 @@
                   <a:srgbClr val="2C2C2C"/>
                 </a:solidFill>
               </a:rPr>
-              <a:t>0 </a:t>
+              <a:t>5 </a:t>
             </a:r>
             <a:r>
               <a:rPr sz="1100" b="0" i="0" dirty="0">

--- a/events/eswc2026/sulo-tutorial-intro.pptx
+++ b/events/eswc2026/sulo-tutorial-intro.pptx
@@ -222,7 +222,7 @@
           <a:p>
             <a:fld id="{76DF6581-109A-4FEC-95AF-6803B81E789D}" type="datetimeFigureOut">
               <a:rPr lang="nl-NL" smtClean="0"/>
-              <a:t>9-5-2026</a:t>
+              <a:t>19-5-2026</a:t>
             </a:fld>
             <a:endParaRPr lang="nl-NL"/>
           </a:p>
@@ -837,7 +837,7 @@
           <a:p>
             <a:fld id="{5BCAD085-E8A6-8845-BD4E-CB4CCA059FC4}" type="datetimeFigureOut">
               <a:rPr lang="en-US" smtClean="0"/>
-              <a:t>5/9/2026</a:t>
+              <a:t>5/19/2026</a:t>
             </a:fld>
             <a:endParaRPr lang="en-US"/>
           </a:p>
@@ -1005,7 +1005,7 @@
           <a:p>
             <a:fld id="{5BCAD085-E8A6-8845-BD4E-CB4CCA059FC4}" type="datetimeFigureOut">
               <a:rPr lang="en-US" smtClean="0"/>
-              <a:t>5/9/2026</a:t>
+              <a:t>5/19/2026</a:t>
             </a:fld>
             <a:endParaRPr lang="en-US"/>
           </a:p>
@@ -1183,7 +1183,7 @@
           <a:p>
             <a:fld id="{5BCAD085-E8A6-8845-BD4E-CB4CCA059FC4}" type="datetimeFigureOut">
               <a:rPr lang="en-US" smtClean="0"/>
-              <a:t>5/9/2026</a:t>
+              <a:t>5/19/2026</a:t>
             </a:fld>
             <a:endParaRPr lang="en-US"/>
           </a:p>
@@ -1351,7 +1351,7 @@
           <a:p>
             <a:fld id="{5BCAD085-E8A6-8845-BD4E-CB4CCA059FC4}" type="datetimeFigureOut">
               <a:rPr lang="en-US" smtClean="0"/>
-              <a:t>5/9/2026</a:t>
+              <a:t>5/19/2026</a:t>
             </a:fld>
             <a:endParaRPr lang="en-US"/>
           </a:p>
@@ -1596,7 +1596,7 @@
           <a:p>
             <a:fld id="{5BCAD085-E8A6-8845-BD4E-CB4CCA059FC4}" type="datetimeFigureOut">
               <a:rPr lang="en-US" smtClean="0"/>
-              <a:t>5/9/2026</a:t>
+              <a:t>5/19/2026</a:t>
             </a:fld>
             <a:endParaRPr lang="en-US"/>
           </a:p>
@@ -1881,7 +1881,7 @@
           <a:p>
             <a:fld id="{5BCAD085-E8A6-8845-BD4E-CB4CCA059FC4}" type="datetimeFigureOut">
               <a:rPr lang="en-US" smtClean="0"/>
-              <a:t>5/9/2026</a:t>
+              <a:t>5/19/2026</a:t>
             </a:fld>
             <a:endParaRPr lang="en-US"/>
           </a:p>
@@ -2300,7 +2300,7 @@
           <a:p>
             <a:fld id="{5BCAD085-E8A6-8845-BD4E-CB4CCA059FC4}" type="datetimeFigureOut">
               <a:rPr lang="en-US" smtClean="0"/>
-              <a:t>5/9/2026</a:t>
+              <a:t>5/19/2026</a:t>
             </a:fld>
             <a:endParaRPr lang="en-US"/>
           </a:p>
@@ -2417,7 +2417,7 @@
           <a:p>
             <a:fld id="{5BCAD085-E8A6-8845-BD4E-CB4CCA059FC4}" type="datetimeFigureOut">
               <a:rPr lang="en-US" smtClean="0"/>
-              <a:t>5/9/2026</a:t>
+              <a:t>5/19/2026</a:t>
             </a:fld>
             <a:endParaRPr lang="en-US"/>
           </a:p>
@@ -2512,7 +2512,7 @@
           <a:p>
             <a:fld id="{5BCAD085-E8A6-8845-BD4E-CB4CCA059FC4}" type="datetimeFigureOut">
               <a:rPr lang="en-US" smtClean="0"/>
-              <a:t>5/9/2026</a:t>
+              <a:t>5/19/2026</a:t>
             </a:fld>
             <a:endParaRPr lang="en-US"/>
           </a:p>
@@ -2787,7 +2787,7 @@
           <a:p>
             <a:fld id="{5BCAD085-E8A6-8845-BD4E-CB4CCA059FC4}" type="datetimeFigureOut">
               <a:rPr lang="en-US" smtClean="0"/>
-              <a:t>5/9/2026</a:t>
+              <a:t>5/19/2026</a:t>
             </a:fld>
             <a:endParaRPr lang="en-US"/>
           </a:p>
@@ -3039,7 +3039,7 @@
           <a:p>
             <a:fld id="{5BCAD085-E8A6-8845-BD4E-CB4CCA059FC4}" type="datetimeFigureOut">
               <a:rPr lang="en-US" smtClean="0"/>
-              <a:t>5/9/2026</a:t>
+              <a:t>5/19/2026</a:t>
             </a:fld>
             <a:endParaRPr lang="en-US"/>
           </a:p>
@@ -3250,7 +3250,7 @@
           <a:p>
             <a:fld id="{5BCAD085-E8A6-8845-BD4E-CB4CCA059FC4}" type="datetimeFigureOut">
               <a:rPr lang="en-US" smtClean="0"/>
-              <a:t>5/9/2026</a:t>
+              <a:t>5/19/2026</a:t>
             </a:fld>
             <a:endParaRPr lang="en-US"/>
           </a:p>
